--- a/module3/lesson13_STM_in_VSCode/lesson13.pptx
+++ b/module3/lesson13_STM_in_VSCode/lesson13.pptx
@@ -7712,7 +7712,7 @@
         </p:nvSpPr>
         <p:spPr>
           <a:xfrm>
-            <a:off x="5349240" y="1307592"/>
+            <a:off x="5312301" y="1303020"/>
             <a:ext cx="3337560" cy="1828800"/>
           </a:xfrm>
           <a:prstGeom prst="rect">
